--- a/imgs/hex-statistical-inference.pptx
+++ b/imgs/hex-statistical-inference.pptx
@@ -6,6 +6,7 @@
   </p:sldMasterIdLst>
   <p:sldIdLst>
     <p:sldId id="257" r:id="rId2"/>
+    <p:sldId id="258" r:id="rId3"/>
   </p:sldIdLst>
   <p:sldSz cx="12192000" cy="6858000"/>
   <p:notesSz cx="6858000" cy="9144000"/>
@@ -104,6 +105,11 @@
       </a:defRPr>
     </a:lvl9pPr>
   </p:defaultTextStyle>
+  <p:extLst>
+    <p:ext uri="{EFAFB233-063F-42B5-8137-9DF3F51BA10A}">
+      <p15:sldGuideLst xmlns:p15="http://schemas.microsoft.com/office/powerpoint/2012/main"/>
+    </p:ext>
+  </p:extLst>
 </p:presentation>
 </file>
 
@@ -3345,7 +3351,7 @@
         </p:nvGrpSpPr>
         <p:grpSpPr>
           <a:xfrm>
-            <a:off x="5893072" y="2264625"/>
+            <a:off x="4590745" y="1560023"/>
             <a:ext cx="2623833" cy="3043646"/>
             <a:chOff x="5893072" y="2264625"/>
             <a:chExt cx="2623833" cy="3043646"/>
@@ -3535,6 +3541,182 @@
     <p:extLst>
       <p:ext uri="{BB962C8B-B14F-4D97-AF65-F5344CB8AC3E}">
         <p14:creationId xmlns:p14="http://schemas.microsoft.com/office/powerpoint/2010/main" val="4166136875"/>
+      </p:ext>
+    </p:extLst>
+  </p:cSld>
+  <p:clrMapOvr>
+    <a:masterClrMapping/>
+  </p:clrMapOvr>
+</p:sld>
+</file>
+
+<file path=ppt/slides/slide2.xml><?xml version="1.0" encoding="utf-8"?>
+<p:sld xmlns:a="http://schemas.openxmlformats.org/drawingml/2006/main" xmlns:r="http://schemas.openxmlformats.org/officeDocument/2006/relationships" xmlns:p="http://schemas.openxmlformats.org/presentationml/2006/main">
+  <p:cSld>
+    <p:spTree>
+      <p:nvGrpSpPr>
+        <p:cNvPr id="1" name=""/>
+        <p:cNvGrpSpPr/>
+        <p:nvPr/>
+      </p:nvGrpSpPr>
+      <p:grpSpPr>
+        <a:xfrm>
+          <a:off x="0" y="0"/>
+          <a:ext cx="0" cy="0"/>
+          <a:chOff x="0" y="0"/>
+          <a:chExt cx="0" cy="0"/>
+        </a:xfrm>
+      </p:grpSpPr>
+      <p:sp>
+        <p:nvSpPr>
+          <p:cNvPr id="5" name="Hexagon 4">
+            <a:extLst>
+              <a:ext uri="{FF2B5EF4-FFF2-40B4-BE49-F238E27FC236}">
+                <a16:creationId xmlns:a16="http://schemas.microsoft.com/office/drawing/2014/main" id="{2FACD726-E8AA-3BA5-191F-DDB5FC9FD278}"/>
+              </a:ext>
+            </a:extLst>
+          </p:cNvPr>
+          <p:cNvSpPr/>
+          <p:nvPr/>
+        </p:nvSpPr>
+        <p:spPr>
+          <a:xfrm rot="16200000">
+            <a:off x="4394028" y="1879833"/>
+            <a:ext cx="3043646" cy="2623833"/>
+          </a:xfrm>
+          <a:prstGeom prst="hexagon">
+            <a:avLst/>
+          </a:prstGeom>
+          <a:blipFill dpi="0" rotWithShape="0">
+            <a:blip r:embed="rId2">
+              <a:alphaModFix amt="5000"/>
+            </a:blip>
+            <a:srcRect/>
+            <a:stretch>
+              <a:fillRect b="42000"/>
+            </a:stretch>
+          </a:blipFill>
+          <a:ln w="57150">
+            <a:solidFill>
+              <a:schemeClr val="tx1"/>
+            </a:solidFill>
+          </a:ln>
+          <a:effectLst>
+            <a:glow>
+              <a:schemeClr val="accent1"/>
+            </a:glow>
+            <a:outerShdw blurRad="50800" dist="50800" dir="5400000" sx="1000" sy="1000" algn="ctr" rotWithShape="0">
+              <a:srgbClr val="000000">
+                <a:alpha val="90000"/>
+              </a:srgbClr>
+            </a:outerShdw>
+            <a:reflection endPos="0" dist="50800" dir="5400000" sy="-100000" algn="bl" rotWithShape="0"/>
+            <a:softEdge rad="0"/>
+          </a:effectLst>
+        </p:spPr>
+        <p:style>
+          <a:lnRef idx="2">
+            <a:schemeClr val="accent1">
+              <a:shade val="50000"/>
+            </a:schemeClr>
+          </a:lnRef>
+          <a:fillRef idx="1">
+            <a:schemeClr val="accent1"/>
+          </a:fillRef>
+          <a:effectRef idx="0">
+            <a:schemeClr val="accent1"/>
+          </a:effectRef>
+          <a:fontRef idx="minor">
+            <a:schemeClr val="lt1"/>
+          </a:fontRef>
+        </p:style>
+        <p:txBody>
+          <a:bodyPr vert="vert" rtlCol="0" anchor="ctr"/>
+          <a:lstStyle/>
+          <a:p>
+            <a:pPr algn="ctr"/>
+            <a:endParaRPr lang="en-US" sz="3000" dirty="0">
+              <a:solidFill>
+                <a:schemeClr val="tx1"/>
+              </a:solidFill>
+            </a:endParaRPr>
+          </a:p>
+          <a:p>
+            <a:pPr algn="ctr"/>
+            <a:endParaRPr lang="en-US" sz="3000" dirty="0">
+              <a:solidFill>
+                <a:schemeClr val="tx1"/>
+              </a:solidFill>
+            </a:endParaRPr>
+          </a:p>
+          <a:p>
+            <a:pPr algn="ctr"/>
+            <a:endParaRPr lang="en-US" sz="3000" b="1" dirty="0">
+              <a:solidFill>
+                <a:schemeClr val="bg2">
+                  <a:lumMod val="10000"/>
+                </a:schemeClr>
+              </a:solidFill>
+            </a:endParaRPr>
+          </a:p>
+          <a:p>
+            <a:pPr algn="ctr"/>
+            <a:r>
+              <a:rPr lang="en-US" sz="3000" b="1" dirty="0">
+                <a:solidFill>
+                  <a:schemeClr val="bg2">
+                    <a:lumMod val="10000"/>
+                  </a:schemeClr>
+                </a:solidFill>
+              </a:rPr>
+              <a:t>Statistical Inference </a:t>
+            </a:r>
+          </a:p>
+        </p:txBody>
+      </p:sp>
+      <p:pic>
+        <p:nvPicPr>
+          <p:cNvPr id="19" name="Graphic 18" descr="Microscope with solid fill">
+            <a:extLst>
+              <a:ext uri="{FF2B5EF4-FFF2-40B4-BE49-F238E27FC236}">
+                <a16:creationId xmlns:a16="http://schemas.microsoft.com/office/drawing/2014/main" id="{C3584A29-8C30-4048-1217-4BC1253604A0}"/>
+              </a:ext>
+            </a:extLst>
+          </p:cNvPr>
+          <p:cNvPicPr>
+            <a:picLocks noChangeAspect="1"/>
+          </p:cNvPicPr>
+          <p:nvPr/>
+        </p:nvPicPr>
+        <p:blipFill>
+          <a:blip r:embed="rId3">
+            <a:extLst>
+              <a:ext uri="{28A0092B-C50C-407E-A947-70E740481C1C}">
+                <a14:useLocalDpi xmlns:a14="http://schemas.microsoft.com/office/drawing/2010/main" val="0"/>
+              </a:ext>
+              <a:ext uri="{96DAC541-7B7A-43D3-8B79-37D633B846F1}">
+                <asvg:svgBlip xmlns:asvg="http://schemas.microsoft.com/office/drawing/2016/SVG/main" r:embed="rId4"/>
+              </a:ext>
+            </a:extLst>
+          </a:blip>
+          <a:stretch>
+            <a:fillRect/>
+          </a:stretch>
+        </p:blipFill>
+        <p:spPr>
+          <a:xfrm>
+            <a:off x="5458651" y="2066191"/>
+            <a:ext cx="914400" cy="914400"/>
+          </a:xfrm>
+          <a:prstGeom prst="rect">
+            <a:avLst/>
+          </a:prstGeom>
+        </p:spPr>
+      </p:pic>
+    </p:spTree>
+    <p:extLst>
+      <p:ext uri="{BB962C8B-B14F-4D97-AF65-F5344CB8AC3E}">
+        <p14:creationId xmlns:p14="http://schemas.microsoft.com/office/powerpoint/2010/main" val="3063780462"/>
       </p:ext>
     </p:extLst>
   </p:cSld>
